--- a/Day10-React-Basics/Day10_Deck_React_Basics.pptx
+++ b/Day10-React-Basics/Day10_Deck_React_Basics.pptx
@@ -4473,13 +4473,13 @@
           <a:noFill/>
         </p:spPr>
         <p:txBody>
-          <a:bodyPr wrap="square" lIns="0" rIns="0" tIns="0" bIns="0" anchor="t">
-            <a:spAutoFit/>
-          </a:bodyPr>
-          <a:lstStyle/>
-          <a:p>
-            <a:r>
-              <a:rPr sz="1040" b="0" i="0">
+          <a:bodyPr wrap="none" lIns="0" rIns="0" tIns="0" bIns="0" anchor="t">
+            <a:spAutoFit/>
+          </a:bodyPr>
+          <a:lstStyle/>
+          <a:p>
+            <a:r>
+              <a:rPr sz="915" b="0" i="0">
                 <a:solidFill>
                   <a:srgbClr val="EAF7F5"/>
                 </a:solidFill>
@@ -4490,7 +4490,7 @@
           </a:p>
           <a:p>
             <a:r>
-              <a:rPr sz="1040" b="0" i="0">
+              <a:rPr sz="915" b="0" i="0">
                 <a:solidFill>
                   <a:srgbClr val="EAF7F5"/>
                 </a:solidFill>
@@ -4501,7 +4501,7 @@
           </a:p>
           <a:p>
             <a:r>
-              <a:rPr sz="1040" b="0" i="0">
+              <a:rPr sz="915" b="0" i="0">
                 <a:solidFill>
                   <a:srgbClr val="EAF7F5"/>
                 </a:solidFill>
@@ -4512,7 +4512,7 @@
           </a:p>
           <a:p>
             <a:r>
-              <a:rPr sz="1040" b="0" i="0">
+              <a:rPr sz="915" b="0" i="0">
                 <a:solidFill>
                   <a:srgbClr val="EAF7F5"/>
                 </a:solidFill>
@@ -4523,7 +4523,7 @@
           </a:p>
           <a:p>
             <a:r>
-              <a:rPr sz="1040" b="0" i="0">
+              <a:rPr sz="915" b="0" i="0">
                 <a:solidFill>
                   <a:srgbClr val="EAF7F5"/>
                 </a:solidFill>
@@ -4534,7 +4534,7 @@
           </a:p>
           <a:p>
             <a:r>
-              <a:rPr sz="1040" b="0" i="0">
+              <a:rPr sz="915" b="0" i="0">
                 <a:solidFill>
                   <a:srgbClr val="EAF7F5"/>
                 </a:solidFill>
@@ -4545,7 +4545,7 @@
           </a:p>
           <a:p>
             <a:r>
-              <a:rPr sz="1040" b="0" i="0">
+              <a:rPr sz="915" b="0" i="0">
                 <a:solidFill>
                   <a:srgbClr val="EAF7F5"/>
                 </a:solidFill>
@@ -4556,7 +4556,7 @@
           </a:p>
           <a:p>
             <a:r>
-              <a:rPr sz="1040" b="0" i="0">
+              <a:rPr sz="915" b="0" i="0">
                 <a:solidFill>
                   <a:srgbClr val="EAF7F5"/>
                 </a:solidFill>
@@ -4567,7 +4567,7 @@
           </a:p>
           <a:p>
             <a:r>
-              <a:rPr sz="1040" b="0" i="0">
+              <a:rPr sz="915" b="0" i="0">
                 <a:solidFill>
                   <a:srgbClr val="EAF7F5"/>
                 </a:solidFill>
@@ -4578,7 +4578,7 @@
           </a:p>
           <a:p>
             <a:r>
-              <a:rPr sz="1040" b="0" i="0">
+              <a:rPr sz="915" b="0" i="0">
                 <a:solidFill>
                   <a:srgbClr val="EAF7F5"/>
                 </a:solidFill>
@@ -4589,7 +4589,7 @@
           </a:p>
           <a:p>
             <a:r>
-              <a:rPr sz="1040" b="0" i="0">
+              <a:rPr sz="915" b="0" i="0">
                 <a:solidFill>
                   <a:srgbClr val="EAF7F5"/>
                 </a:solidFill>
@@ -4877,13 +4877,13 @@
           <a:noFill/>
         </p:spPr>
         <p:txBody>
-          <a:bodyPr wrap="square" lIns="0" rIns="0" tIns="0" bIns="0" anchor="t">
-            <a:spAutoFit/>
-          </a:bodyPr>
-          <a:lstStyle/>
-          <a:p>
-            <a:r>
-              <a:rPr sz="1307" b="0" i="0">
+          <a:bodyPr wrap="none" lIns="0" rIns="0" tIns="0" bIns="0" anchor="t">
+            <a:spAutoFit/>
+          </a:bodyPr>
+          <a:lstStyle/>
+          <a:p>
+            <a:r>
+              <a:rPr sz="1150" b="0" i="0">
                 <a:solidFill>
                   <a:srgbClr val="EAF7F5"/>
                 </a:solidFill>
@@ -4894,7 +4894,7 @@
           </a:p>
           <a:p>
             <a:r>
-              <a:rPr sz="1307" b="0" i="0">
+              <a:rPr sz="1150" b="0" i="0">
                 <a:solidFill>
                   <a:srgbClr val="EAF7F5"/>
                 </a:solidFill>
@@ -4905,7 +4905,7 @@
           </a:p>
           <a:p>
             <a:r>
-              <a:rPr sz="1307" b="0" i="0">
+              <a:rPr sz="1150" b="0" i="0">
                 <a:solidFill>
                   <a:srgbClr val="EAF7F5"/>
                 </a:solidFill>
@@ -4916,7 +4916,7 @@
           </a:p>
           <a:p>
             <a:r>
-              <a:rPr sz="1307" b="0" i="0">
+              <a:rPr sz="1150" b="0" i="0">
                 <a:solidFill>
                   <a:srgbClr val="EAF7F5"/>
                 </a:solidFill>
@@ -4927,7 +4927,7 @@
           </a:p>
           <a:p>
             <a:r>
-              <a:rPr sz="1307" b="0" i="0">
+              <a:rPr sz="1150" b="0" i="0">
                 <a:solidFill>
                   <a:srgbClr val="EAF7F5"/>
                 </a:solidFill>
@@ -4938,7 +4938,7 @@
           </a:p>
           <a:p>
             <a:r>
-              <a:rPr sz="1307" b="0" i="0">
+              <a:rPr sz="1150" b="0" i="0">
                 <a:solidFill>
                   <a:srgbClr val="EAF7F5"/>
                 </a:solidFill>
@@ -4949,7 +4949,7 @@
           </a:p>
           <a:p>
             <a:r>
-              <a:rPr sz="1307" b="0" i="0">
+              <a:rPr sz="1150" b="0" i="0">
                 <a:solidFill>
                   <a:srgbClr val="EAF7F5"/>
                 </a:solidFill>
@@ -4960,7 +4960,7 @@
           </a:p>
           <a:p>
             <a:r>
-              <a:rPr sz="1307" b="0" i="0">
+              <a:rPr sz="1150" b="0" i="0">
                 <a:solidFill>
                   <a:srgbClr val="EAF7F5"/>
                 </a:solidFill>
@@ -4971,7 +4971,7 @@
           </a:p>
           <a:p>
             <a:r>
-              <a:rPr sz="1307" b="0" i="0">
+              <a:rPr sz="1150" b="0" i="0">
                 <a:solidFill>
                   <a:srgbClr val="EAF7F5"/>
                 </a:solidFill>
@@ -4982,7 +4982,7 @@
           </a:p>
           <a:p>
             <a:r>
-              <a:rPr sz="1307" b="0" i="0">
+              <a:rPr sz="1150" b="0" i="0">
                 <a:solidFill>
                   <a:srgbClr val="EAF7F5"/>
                 </a:solidFill>
@@ -4993,7 +4993,7 @@
           </a:p>
           <a:p>
             <a:r>
-              <a:rPr sz="1307" b="0" i="0">
+              <a:rPr sz="1150" b="0" i="0">
                 <a:solidFill>
                   <a:srgbClr val="EAF7F5"/>
                 </a:solidFill>
@@ -5004,7 +5004,7 @@
           </a:p>
           <a:p>
             <a:r>
-              <a:rPr sz="1307" b="0" i="0">
+              <a:rPr sz="1150" b="0" i="0">
                 <a:solidFill>
                   <a:srgbClr val="EAF7F5"/>
                 </a:solidFill>
@@ -5847,13 +5847,13 @@
           <a:noFill/>
         </p:spPr>
         <p:txBody>
-          <a:bodyPr wrap="square" lIns="0" rIns="0" tIns="0" bIns="0" anchor="t">
-            <a:spAutoFit/>
-          </a:bodyPr>
-          <a:lstStyle/>
-          <a:p>
-            <a:r>
-              <a:rPr sz="1275" b="0" i="0">
+          <a:bodyPr wrap="none" lIns="0" rIns="0" tIns="0" bIns="0" anchor="t">
+            <a:spAutoFit/>
+          </a:bodyPr>
+          <a:lstStyle/>
+          <a:p>
+            <a:r>
+              <a:rPr sz="1122" b="0" i="0">
                 <a:solidFill>
                   <a:srgbClr val="EAF7F5"/>
                 </a:solidFill>
@@ -5864,7 +5864,7 @@
           </a:p>
           <a:p>
             <a:r>
-              <a:rPr sz="1275" b="0" i="0">
+              <a:rPr sz="1122" b="0" i="0">
                 <a:solidFill>
                   <a:srgbClr val="EAF7F5"/>
                 </a:solidFill>
@@ -5875,7 +5875,7 @@
           </a:p>
           <a:p>
             <a:r>
-              <a:rPr sz="1275" b="0" i="0">
+              <a:rPr sz="1122" b="0" i="0">
                 <a:solidFill>
                   <a:srgbClr val="EAF7F5"/>
                 </a:solidFill>
@@ -5886,7 +5886,7 @@
           </a:p>
           <a:p>
             <a:r>
-              <a:rPr sz="1275" b="0" i="0">
+              <a:rPr sz="1122" b="0" i="0">
                 <a:solidFill>
                   <a:srgbClr val="EAF7F5"/>
                 </a:solidFill>
@@ -5897,7 +5897,7 @@
           </a:p>
           <a:p>
             <a:r>
-              <a:rPr sz="1275" b="0" i="0">
+              <a:rPr sz="1122" b="0" i="0">
                 <a:solidFill>
                   <a:srgbClr val="EAF7F5"/>
                 </a:solidFill>
@@ -5908,7 +5908,7 @@
           </a:p>
           <a:p>
             <a:r>
-              <a:rPr sz="1275" b="0" i="0">
+              <a:rPr sz="1122" b="0" i="0">
                 <a:solidFill>
                   <a:srgbClr val="EAF7F5"/>
                 </a:solidFill>
@@ -5919,7 +5919,7 @@
           </a:p>
           <a:p>
             <a:r>
-              <a:rPr sz="1275" b="0" i="0">
+              <a:rPr sz="1122" b="0" i="0">
                 <a:solidFill>
                   <a:srgbClr val="EAF7F5"/>
                 </a:solidFill>
@@ -5930,7 +5930,7 @@
           </a:p>
           <a:p>
             <a:r>
-              <a:rPr sz="1275" b="0" i="0">
+              <a:rPr sz="1122" b="0" i="0">
                 <a:solidFill>
                   <a:srgbClr val="EAF7F5"/>
                 </a:solidFill>
@@ -5941,7 +5941,7 @@
           </a:p>
           <a:p>
             <a:r>
-              <a:rPr sz="1275" b="0" i="0">
+              <a:rPr sz="1122" b="0" i="0">
                 <a:solidFill>
                   <a:srgbClr val="EAF7F5"/>
                 </a:solidFill>
@@ -5952,7 +5952,7 @@
           </a:p>
           <a:p>
             <a:r>
-              <a:rPr sz="1275" b="0" i="0">
+              <a:rPr sz="1122" b="0" i="0">
                 <a:solidFill>
                   <a:srgbClr val="EAF7F5"/>
                 </a:solidFill>
@@ -5963,7 +5963,7 @@
           </a:p>
           <a:p>
             <a:r>
-              <a:rPr sz="1275" b="0" i="0">
+              <a:rPr sz="1122" b="0" i="0">
                 <a:solidFill>
                   <a:srgbClr val="EAF7F5"/>
                 </a:solidFill>
@@ -5974,7 +5974,7 @@
           </a:p>
           <a:p>
             <a:r>
-              <a:rPr sz="1275" b="0" i="0">
+              <a:rPr sz="1122" b="0" i="0">
                 <a:solidFill>
                   <a:srgbClr val="EAF7F5"/>
                 </a:solidFill>
@@ -5985,7 +5985,7 @@
           </a:p>
           <a:p>
             <a:r>
-              <a:rPr sz="1275" b="0" i="0">
+              <a:rPr sz="1122" b="0" i="0">
                 <a:solidFill>
                   <a:srgbClr val="EAF7F5"/>
                 </a:solidFill>
@@ -5996,7 +5996,7 @@
           </a:p>
           <a:p>
             <a:r>
-              <a:rPr sz="1275" b="0" i="0">
+              <a:rPr sz="1122" b="0" i="0">
                 <a:solidFill>
                   <a:srgbClr val="EAF7F5"/>
                 </a:solidFill>
@@ -6284,13 +6284,13 @@
           <a:noFill/>
         </p:spPr>
         <p:txBody>
-          <a:bodyPr wrap="square" lIns="0" rIns="0" tIns="0" bIns="0" anchor="t">
-            <a:spAutoFit/>
-          </a:bodyPr>
-          <a:lstStyle/>
-          <a:p>
-            <a:r>
-              <a:rPr sz="1159" b="0" i="0">
+          <a:bodyPr wrap="none" lIns="0" rIns="0" tIns="0" bIns="0" anchor="t">
+            <a:spAutoFit/>
+          </a:bodyPr>
+          <a:lstStyle/>
+          <a:p>
+            <a:r>
+              <a:rPr sz="1020" b="0" i="0">
                 <a:solidFill>
                   <a:srgbClr val="EAF7F5"/>
                 </a:solidFill>
@@ -6301,7 +6301,7 @@
           </a:p>
           <a:p>
             <a:r>
-              <a:rPr sz="1159" b="0" i="0">
+              <a:rPr sz="1020" b="0" i="0">
                 <a:solidFill>
                   <a:srgbClr val="EAF7F5"/>
                 </a:solidFill>
@@ -6312,7 +6312,7 @@
           </a:p>
           <a:p>
             <a:r>
-              <a:rPr sz="1159" b="0" i="0">
+              <a:rPr sz="1020" b="0" i="0">
                 <a:solidFill>
                   <a:srgbClr val="EAF7F5"/>
                 </a:solidFill>
@@ -6323,7 +6323,7 @@
           </a:p>
           <a:p>
             <a:r>
-              <a:rPr sz="1159" b="0" i="0">
+              <a:rPr sz="1020" b="0" i="0">
                 <a:solidFill>
                   <a:srgbClr val="EAF7F5"/>
                 </a:solidFill>
@@ -6334,7 +6334,7 @@
           </a:p>
           <a:p>
             <a:r>
-              <a:rPr sz="1159" b="0" i="0">
+              <a:rPr sz="1020" b="0" i="0">
                 <a:solidFill>
                   <a:srgbClr val="EAF7F5"/>
                 </a:solidFill>
@@ -6345,7 +6345,7 @@
           </a:p>
           <a:p>
             <a:r>
-              <a:rPr sz="1159" b="0" i="0">
+              <a:rPr sz="1020" b="0" i="0">
                 <a:solidFill>
                   <a:srgbClr val="EAF7F5"/>
                 </a:solidFill>
@@ -6356,7 +6356,7 @@
           </a:p>
           <a:p>
             <a:r>
-              <a:rPr sz="1159" b="0" i="0">
+              <a:rPr sz="1020" b="0" i="0">
                 <a:solidFill>
                   <a:srgbClr val="EAF7F5"/>
                 </a:solidFill>
@@ -6367,7 +6367,7 @@
           </a:p>
           <a:p>
             <a:r>
-              <a:rPr sz="1159" b="0" i="0">
+              <a:rPr sz="1020" b="0" i="0">
                 <a:solidFill>
                   <a:srgbClr val="EAF7F5"/>
                 </a:solidFill>
@@ -6378,7 +6378,7 @@
           </a:p>
           <a:p>
             <a:r>
-              <a:rPr sz="1159" b="0" i="0">
+              <a:rPr sz="1020" b="0" i="0">
                 <a:solidFill>
                   <a:srgbClr val="EAF7F5"/>
                 </a:solidFill>
@@ -6389,7 +6389,7 @@
           </a:p>
           <a:p>
             <a:r>
-              <a:rPr sz="1159" b="0" i="0">
+              <a:rPr sz="1020" b="0" i="0">
                 <a:solidFill>
                   <a:srgbClr val="EAF7F5"/>
                 </a:solidFill>
@@ -6400,7 +6400,7 @@
           </a:p>
           <a:p>
             <a:r>
-              <a:rPr sz="1159" b="0" i="0">
+              <a:rPr sz="1020" b="0" i="0">
                 <a:solidFill>
                   <a:srgbClr val="EAF7F5"/>
                 </a:solidFill>
@@ -7218,13 +7218,13 @@
           <a:noFill/>
         </p:spPr>
         <p:txBody>
-          <a:bodyPr wrap="square" lIns="0" rIns="0" tIns="0" bIns="0" anchor="t">
-            <a:spAutoFit/>
-          </a:bodyPr>
-          <a:lstStyle/>
-          <a:p>
-            <a:r>
-              <a:rPr sz="1214" b="0" i="0">
+          <a:bodyPr wrap="none" lIns="0" rIns="0" tIns="0" bIns="0" anchor="t">
+            <a:spAutoFit/>
+          </a:bodyPr>
+          <a:lstStyle/>
+          <a:p>
+            <a:r>
+              <a:rPr sz="1068" b="0" i="0">
                 <a:solidFill>
                   <a:srgbClr val="EAF7F5"/>
                 </a:solidFill>
@@ -7235,7 +7235,7 @@
           </a:p>
           <a:p>
             <a:r>
-              <a:rPr sz="1214" b="0" i="0">
+              <a:rPr sz="1068" b="0" i="0">
                 <a:solidFill>
                   <a:srgbClr val="EAF7F5"/>
                 </a:solidFill>
@@ -7246,7 +7246,7 @@
           </a:p>
           <a:p>
             <a:r>
-              <a:rPr sz="1214" b="0" i="0">
+              <a:rPr sz="1068" b="0" i="0">
                 <a:solidFill>
                   <a:srgbClr val="EAF7F5"/>
                 </a:solidFill>
@@ -7257,7 +7257,7 @@
           </a:p>
           <a:p>
             <a:r>
-              <a:rPr sz="1214" b="0" i="0">
+              <a:rPr sz="1068" b="0" i="0">
                 <a:solidFill>
                   <a:srgbClr val="EAF7F5"/>
                 </a:solidFill>
@@ -7268,7 +7268,7 @@
           </a:p>
           <a:p>
             <a:r>
-              <a:rPr sz="1214" b="0" i="0">
+              <a:rPr sz="1068" b="0" i="0">
                 <a:solidFill>
                   <a:srgbClr val="EAF7F5"/>
                 </a:solidFill>
@@ -7279,7 +7279,7 @@
           </a:p>
           <a:p>
             <a:r>
-              <a:rPr sz="1214" b="0" i="0">
+              <a:rPr sz="1068" b="0" i="0">
                 <a:solidFill>
                   <a:srgbClr val="EAF7F5"/>
                 </a:solidFill>
@@ -7290,7 +7290,7 @@
           </a:p>
           <a:p>
             <a:r>
-              <a:rPr sz="1214" b="0" i="0">
+              <a:rPr sz="1068" b="0" i="0">
                 <a:solidFill>
                   <a:srgbClr val="EAF7F5"/>
                 </a:solidFill>
@@ -7301,7 +7301,7 @@
           </a:p>
           <a:p>
             <a:r>
-              <a:rPr sz="1214" b="0" i="0">
+              <a:rPr sz="1068" b="0" i="0">
                 <a:solidFill>
                   <a:srgbClr val="EAF7F5"/>
                 </a:solidFill>
@@ -7312,7 +7312,7 @@
           </a:p>
           <a:p>
             <a:r>
-              <a:rPr sz="1214" b="0" i="0">
+              <a:rPr sz="1068" b="0" i="0">
                 <a:solidFill>
                   <a:srgbClr val="EAF7F5"/>
                 </a:solidFill>
@@ -7323,7 +7323,7 @@
           </a:p>
           <a:p>
             <a:r>
-              <a:rPr sz="1214" b="0" i="0">
+              <a:rPr sz="1068" b="0" i="0">
                 <a:solidFill>
                   <a:srgbClr val="EAF7F5"/>
                 </a:solidFill>
@@ -18603,13 +18603,13 @@
           <a:noFill/>
         </p:spPr>
         <p:txBody>
-          <a:bodyPr wrap="square" lIns="0" rIns="0" tIns="0" bIns="0" anchor="t">
-            <a:spAutoFit/>
-          </a:bodyPr>
-          <a:lstStyle/>
-          <a:p>
-            <a:r>
-              <a:rPr sz="1214" b="0" i="0">
+          <a:bodyPr wrap="none" lIns="0" rIns="0" tIns="0" bIns="0" anchor="t">
+            <a:spAutoFit/>
+          </a:bodyPr>
+          <a:lstStyle/>
+          <a:p>
+            <a:r>
+              <a:rPr sz="1068" b="0" i="0">
                 <a:solidFill>
                   <a:srgbClr val="EAF7F5"/>
                 </a:solidFill>
@@ -18620,7 +18620,7 @@
           </a:p>
           <a:p>
             <a:r>
-              <a:rPr sz="1214" b="0" i="0">
+              <a:rPr sz="1068" b="0" i="0">
                 <a:solidFill>
                   <a:srgbClr val="EAF7F5"/>
                 </a:solidFill>
@@ -18631,7 +18631,7 @@
           </a:p>
           <a:p>
             <a:r>
-              <a:rPr sz="1214" b="0" i="0">
+              <a:rPr sz="1068" b="0" i="0">
                 <a:solidFill>
                   <a:srgbClr val="EAF7F5"/>
                 </a:solidFill>
@@ -18642,7 +18642,7 @@
           </a:p>
           <a:p>
             <a:r>
-              <a:rPr sz="1214" b="0" i="0">
+              <a:rPr sz="1068" b="0" i="0">
                 <a:solidFill>
                   <a:srgbClr val="EAF7F5"/>
                 </a:solidFill>
@@ -18653,7 +18653,7 @@
           </a:p>
           <a:p>
             <a:r>
-              <a:rPr sz="1214" b="0" i="0">
+              <a:rPr sz="1068" b="0" i="0">
                 <a:solidFill>
                   <a:srgbClr val="EAF7F5"/>
                 </a:solidFill>
@@ -18664,7 +18664,7 @@
           </a:p>
           <a:p>
             <a:r>
-              <a:rPr sz="1214" b="0" i="0">
+              <a:rPr sz="1068" b="0" i="0">
                 <a:solidFill>
                   <a:srgbClr val="EAF7F5"/>
                 </a:solidFill>
@@ -18675,7 +18675,7 @@
           </a:p>
           <a:p>
             <a:r>
-              <a:rPr sz="1214" b="0" i="0">
+              <a:rPr sz="1068" b="0" i="0">
                 <a:solidFill>
                   <a:srgbClr val="EAF7F5"/>
                 </a:solidFill>
@@ -18686,7 +18686,7 @@
           </a:p>
           <a:p>
             <a:r>
-              <a:rPr sz="1214" b="0" i="0">
+              <a:rPr sz="1068" b="0" i="0">
                 <a:solidFill>
                   <a:srgbClr val="EAF7F5"/>
                 </a:solidFill>
@@ -18697,7 +18697,7 @@
           </a:p>
           <a:p>
             <a:r>
-              <a:rPr sz="1214" b="0" i="0">
+              <a:rPr sz="1068" b="0" i="0">
                 <a:solidFill>
                   <a:srgbClr val="EAF7F5"/>
                 </a:solidFill>
@@ -18708,7 +18708,7 @@
           </a:p>
           <a:p>
             <a:r>
-              <a:rPr sz="1214" b="0" i="0">
+              <a:rPr sz="1068" b="0" i="0">
                 <a:solidFill>
                   <a:srgbClr val="EAF7F5"/>
                 </a:solidFill>
